--- a/AHP模型/数据处理与建模-AHP模型案例 .pptx
+++ b/AHP模型/数据处理与建模-AHP模型案例 .pptx
@@ -211,7 +211,7 @@
           <a:p>
             <a:fld id="{2D3D5AAD-12B1-4117-8A4B-C4109D64BF51}" type="datetimeFigureOut">
               <a:rPr lang="zh-CN" altLang="en-US" smtClean="0"/>
-              <a:t>2026/6/3</a:t>
+              <a:t>2026/6/4</a:t>
             </a:fld>
             <a:endParaRPr lang="zh-CN" altLang="en-US"/>
           </a:p>
@@ -7230,7 +7230,7 @@
         </p:spPr>
         <p:txBody>
           <a:bodyPr wrap="square" rtlCol="0">
-            <a:spAutoFit/>
+            <a:normAutofit/>
           </a:bodyPr>
           <a:lstStyle>
             <a:defPPr>
@@ -7301,7 +7301,9 @@
           </a:prstGeom>
         </p:spPr>
         <p:txBody>
-          <a:bodyPr/>
+          <a:bodyPr wrap="square">
+            <a:normAutofit/>
+          </a:bodyPr>
           <a:lstStyle>
             <a:defPPr>
               <a:defRPr lang="zh-CN"/>
@@ -7514,7 +7516,9 @@
           </a:extLst>
         </p:spPr>
         <p:txBody>
-          <a:bodyPr vert="horz" wrap="square" lIns="91440" tIns="45720" rIns="91440" bIns="45720" numCol="1" anchor="ctr" anchorCtr="0" compatLnSpc="1"/>
+          <a:bodyPr vert="horz" wrap="square" lIns="91440" tIns="45720" rIns="91440" bIns="45720" numCol="1" anchor="ctr" anchorCtr="0" compatLnSpc="1">
+            <a:normAutofit/>
+          </a:bodyPr>
           <a:lstStyle>
             <a:defPPr>
               <a:defRPr lang="en-US"/>
@@ -7748,7 +7752,9 @@
           </a:fontRef>
         </p:style>
         <p:txBody>
-          <a:bodyPr rtlCol="0" anchor="ctr"/>
+          <a:bodyPr wrap="square" rtlCol="0" anchor="ctr">
+            <a:normAutofit/>
+          </a:bodyPr>
           <a:lstStyle/>
           <a:p>
             <a:pPr marL="0" marR="0" lvl="0" indent="0" algn="ctr" defTabSz="914400" rtl="0" eaLnBrk="1" fontAlgn="auto" latinLnBrk="0" hangingPunct="1">
@@ -8153,7 +8159,9 @@
           </a:fontRef>
         </p:style>
         <p:txBody>
-          <a:bodyPr rtlCol="0" anchor="ctr"/>
+          <a:bodyPr wrap="square" rtlCol="0" anchor="ctr">
+            <a:normAutofit/>
+          </a:bodyPr>
           <a:lstStyle/>
           <a:p>
             <a:pPr marL="0" marR="0" lvl="0" indent="0" algn="ctr" defTabSz="914400" rtl="0" eaLnBrk="1" fontAlgn="auto" latinLnBrk="0" hangingPunct="1">
@@ -8562,8 +8570,8 @@
         </p:nvSpPr>
         <p:spPr>
           <a:xfrm>
-            <a:off x="148640" y="1560652"/>
-            <a:ext cx="6281977" cy="4716932"/>
+            <a:off x="148640" y="1569816"/>
+            <a:ext cx="6277708" cy="5190836"/>
           </a:xfrm>
           <a:prstGeom prst="rect">
             <a:avLst/>
@@ -8572,40 +8580,55 @@
         </p:spPr>
         <p:txBody>
           <a:bodyPr wrap="square">
-            <a:spAutoFit/>
+            <a:normAutofit/>
           </a:bodyPr>
           <a:lstStyle/>
           <a:p>
             <a:r>
-              <a:rPr b="1" lang="zh-CN" sz="1200"/>
-              <a:t>栖息地空间分布：</a:t>
+              <a:rPr lang="zh-CN" sz="1100" b="1"/>
+              <a:t>栖息地空间分布（图6）：</a:t>
             </a:r>
           </a:p>
           <a:p>
             <a:r>
-              <a:t>三峡库区越冬水禽适宜栖息地主要分布在长江主航道及其周围支流和湖泊，仅占库区总面积的1.6%~2.4%。不适宜区域分布于高海拔林地和人类活动干扰较大的区域，主要位于巫溪县、奉节县、武隆县南部等地。</a:t>
+              <a:rPr lang="zh-CN" sz="900"/>
+              <a:t>适宜区集中分布于长江主航道及支流沿岸低海拔湿地，仅占库区1.6%~2.4%。不适宜区位于高海拔林地与城镇周边。</a:t>
             </a:r>
           </a:p>
           <a:p>
             <a:r>
-              <a:rPr b="1" lang="zh-CN" sz="1200"/>
-              <a:t>栖息地面积变化趋势：</a:t>
+              <a:rPr lang="zh-CN" sz="1100" b="1"/>
+              <a:t>关键因子变化（图2-5）：</a:t>
             </a:r>
           </a:p>
           <a:p>
             <a:r>
-              <a:t>受三峡大坝建设影响，适宜栖息地从1995年的3190 km²（占5.5%）骤降至2000年的1.6%。此后随着蓄水高度增加缓慢回升，2020年达1392 km²（占2.4%），仍与蓄水前有较大差距。不适宜区1995—2000年面积占比增加12.1%，2000年后趋于稳定。</a:t>
+              <a:rPr lang="zh-CN" sz="900"/>
+              <a:t>不透水层1.1%→2.7%，耕地44.1%→42.2%，湿地和水体1.4%→1.7%，居民点1.08%→2.45%，越冬期均温0~15℃（库尾&gt;库首）。</a:t>
             </a:r>
           </a:p>
           <a:p>
             <a:r>
-              <a:rPr b="1" lang="zh-CN" sz="1200"/>
-              <a:t>研究方法验证与共识：</a:t>
+              <a:rPr lang="zh-CN" sz="1100" b="1"/>
+              <a:t>栖息地面积趋势（图7-8）：</a:t>
             </a:r>
           </a:p>
           <a:p>
             <a:r>
-              <a:t>本研究基于专家知识驱动的AHP方法，独立验证了前人MaxEnt数据驱动模型的主要结论。两种方法在空间分布、适宜区面积及变化趋势上的高度吻合，增强了三峡库区栖息地适宜性评价的可靠性与稳健性。</a:t>
+              <a:rPr lang="zh-CN" sz="900"/>
+              <a:t>1995年3190km²(5.5%)→2000年骤降至1.6%→此后缓慢回升至2020年1392km²(2.4%)，未恢复蓄水前水平。不适宜区1995-2000年+12.1%。</a:t>
+            </a:r>
+          </a:p>
+          <a:p>
+            <a:r>
+              <a:rPr lang="zh-CN" sz="1100" b="1"/>
+              <a:t>AHP与MaxEnt相互验证（表5）：</a:t>
+            </a:r>
+          </a:p>
+          <a:p>
+            <a:r>
+              <a:rPr lang="zh-CN" sz="900"/>
+              <a:t>本研究与Li等[12]MaxEnt模型在空间分布、面积和趋势上高度一致，1995年高适宜区均为长江干流及周边，变化趋势均呈骤降→稳定→微升，两种独立方法增强结论可靠性。</a:t>
             </a:r>
           </a:p>
         </p:txBody>
@@ -8677,7 +8700,9 @@
           </a:effectLst>
         </p:spPr>
         <p:txBody>
-          <a:bodyPr rtlCol="0" anchor="ctr"/>
+          <a:bodyPr wrap="square" rtlCol="0" anchor="ctr">
+            <a:normAutofit/>
+          </a:bodyPr>
           <a:lstStyle/>
           <a:p>
             <a:pPr algn="ctr" defTabSz="914400">
@@ -8743,24 +8768,29 @@
           </a:fontRef>
         </p:style>
         <p:txBody>
-          <a:bodyPr lIns="0" rIns="0" rtlCol="0" anchor="ctr"/>
+          <a:bodyPr wrap="square" lIns="0" rIns="0" rtlCol="0" anchor="ctr">
+            <a:normAutofit/>
+          </a:bodyPr>
           <a:lstStyle/>
           <a:p>
             <a:r>
-              <a:t>AHP模型为三峡库区越冬水禽栖息地评价和保护规划提供了科学依据，方法简单有效，结果易于被管理部门理解和应用。</a:t>
+              <a:rPr sz="1100" dirty="0" err="1">
+                <a:solidFill>
+                  <a:srgbClr val="C00000"/>
+                </a:solidFill>
+              </a:rPr>
+              <a:t>AHP模型为三峡库区越冬水禽栖息地评价和保护规划提供了科学依据，方法简单有效，结果易于被管理部门理解和应用</a:t>
+            </a:r>
+            <a:r>
+              <a:rPr sz="1100" dirty="0"/>
+              <a:t>。</a:t>
             </a:r>
           </a:p>
         </p:txBody>
       </p:sp>
       <p:pic>
         <p:nvPicPr>
-          <p:cNvPr id="3" name="图片 2">
-            <a:extLst>
-              <a:ext uri="{FF2B5EF4-FFF2-40B4-BE49-F238E27FC236}">
-                <a16:creationId xmlns:a16="http://schemas.microsoft.com/office/drawing/2014/main" id="{23A54193-37B1-D084-D650-B67DCA5D9583}"/>
-              </a:ext>
-            </a:extLst>
-          </p:cNvPr>
+          <p:cNvPr id="79" name="Picture 78" descr="_fig6_suitability1995.png"/>
           <p:cNvPicPr>
             <a:picLocks noChangeAspect="1"/>
           </p:cNvPicPr>
@@ -8784,13 +8814,7 @@
       </p:pic>
       <p:pic>
         <p:nvPicPr>
-          <p:cNvPr id="4" name="图片 3">
-            <a:extLst>
-              <a:ext uri="{FF2B5EF4-FFF2-40B4-BE49-F238E27FC236}">
-                <a16:creationId xmlns:a16="http://schemas.microsoft.com/office/drawing/2014/main" id="{C73D2753-4CC6-272D-814C-463C6A1692E2}"/>
-              </a:ext>
-            </a:extLst>
-          </p:cNvPr>
+          <p:cNvPr id="80" name="Picture 79" descr="_fig7_suitability_change.png"/>
           <p:cNvPicPr>
             <a:picLocks noChangeAspect="1"/>
           </p:cNvPicPr>
@@ -8814,13 +8838,7 @@
       </p:pic>
       <p:pic>
         <p:nvPicPr>
-          <p:cNvPr id="5" name="图片 4">
-            <a:extLst>
-              <a:ext uri="{FF2B5EF4-FFF2-40B4-BE49-F238E27FC236}">
-                <a16:creationId xmlns:a16="http://schemas.microsoft.com/office/drawing/2014/main" id="{C62A89A2-538E-CAC2-B1A7-401B043039CB}"/>
-              </a:ext>
-            </a:extLst>
-          </p:cNvPr>
+          <p:cNvPr id="81" name="Picture 80" descr="_fig8_area_percent.png"/>
           <p:cNvPicPr>
             <a:picLocks noChangeAspect="1"/>
           </p:cNvPicPr>
@@ -8844,13 +8862,7 @@
       </p:pic>
       <p:pic>
         <p:nvPicPr>
-          <p:cNvPr id="6" name="图片 5">
-            <a:extLst>
-              <a:ext uri="{FF2B5EF4-FFF2-40B4-BE49-F238E27FC236}">
-                <a16:creationId xmlns:a16="http://schemas.microsoft.com/office/drawing/2014/main" id="{8A5A919F-D0F8-7529-B620-D8D9A33C026D}"/>
-              </a:ext>
-            </a:extLst>
-          </p:cNvPr>
+          <p:cNvPr id="82" name="Picture 81" descr="_table5_comparison.png"/>
           <p:cNvPicPr>
             <a:picLocks noChangeAspect="1"/>
           </p:cNvPicPr>
@@ -10104,7 +10116,7 @@
                   <a:ea typeface="微软雅黑" panose="020B0503020204020204" pitchFamily="34" charset="-122"/>
                   <a:sym typeface="Times New Roman" panose="02020603050405020304" pitchFamily="18" charset="0"/>
                 </a:rPr>
-                <a:t>汇报人：周嘉伟</a:t>
+                <a:t>汇报人：罗睿思</a:t>
               </a:r>
             </a:p>
           </p:txBody>
@@ -16718,7 +16730,7 @@
         <p:spPr>
           <a:xfrm>
             <a:off x="298115" y="944284"/>
-            <a:ext cx="11595769" cy="1005788"/>
+            <a:ext cx="11595769" cy="900000"/>
           </a:xfrm>
           <a:prstGeom prst="rect">
             <a:avLst/>
@@ -16727,7 +16739,7 @@
         </p:spPr>
         <p:txBody>
           <a:bodyPr wrap="square" rtlCol="0">
-            <a:spAutoFit/>
+            <a:normAutofit/>
           </a:bodyPr>
           <a:lstStyle>
             <a:defPPr>
@@ -16765,7 +16777,7 @@
           </a:lstStyle>
           <a:p>
             <a:r>
-              <a:t>三峡库区是指受三峡工程淹没的地区，位于28°56'—31°44'N，106°16'—111°28'E，面积约5.8×10⁴ km²，包括重庆市和湖北省共26个县市区。季节性的水位波动形成了长江、洲滩、湖泊、江心岛屿一体的内陆淡水湿地生态系统，为多种水禽提供越冬生境。</a:t>
+              <a:t>三峡库区位于28°56'—31°44'N，106°16'—111°28'E，面积约5.8×10⁴ km²，涵盖重庆市和湖北省26个县市区。季节性水位波动形成了长江、洲滩、湖泊、江心岛屿一体的内陆淡水湿地生态系统，为斑嘴鸭、绿头鸭、中华秋沙鸭等多种水禽提供越冬生境。</a:t>
             </a:r>
           </a:p>
         </p:txBody>
@@ -16794,7 +16806,9 @@
           </a:prstGeom>
         </p:spPr>
         <p:txBody>
-          <a:bodyPr/>
+          <a:bodyPr wrap="square">
+            <a:normAutofit/>
+          </a:bodyPr>
           <a:lstStyle>
             <a:defPPr>
               <a:defRPr lang="zh-CN"/>
@@ -17007,7 +17021,9 @@
           </a:extLst>
         </p:spPr>
         <p:txBody>
-          <a:bodyPr vert="horz" wrap="square" lIns="91440" tIns="45720" rIns="91440" bIns="45720" numCol="1" anchor="ctr" anchorCtr="0" compatLnSpc="1"/>
+          <a:bodyPr vert="horz" wrap="square" lIns="91440" tIns="45720" rIns="91440" bIns="45720" numCol="1" anchor="ctr" anchorCtr="0" compatLnSpc="1">
+            <a:normAutofit/>
+          </a:bodyPr>
           <a:lstStyle>
             <a:defPPr>
               <a:defRPr lang="en-US"/>
@@ -17241,7 +17257,9 @@
           </a:fontRef>
         </p:style>
         <p:txBody>
-          <a:bodyPr rtlCol="0" anchor="ctr"/>
+          <a:bodyPr wrap="square" rtlCol="0" anchor="ctr">
+            <a:normAutofit/>
+          </a:bodyPr>
           <a:lstStyle/>
           <a:p>
             <a:pPr marL="0" marR="0" lvl="0" indent="0" algn="ctr" defTabSz="914400" rtl="0" eaLnBrk="1" fontAlgn="auto" latinLnBrk="0" hangingPunct="1">
@@ -17654,7 +17672,9 @@
           </a:fontRef>
         </p:style>
         <p:txBody>
-          <a:bodyPr rtlCol="0" anchor="ctr"/>
+          <a:bodyPr wrap="square" rtlCol="0" anchor="ctr">
+            <a:normAutofit/>
+          </a:bodyPr>
           <a:lstStyle/>
           <a:p>
             <a:pPr marL="0" marR="0" lvl="0" indent="0" algn="ctr" defTabSz="914400" rtl="0" eaLnBrk="1" fontAlgn="auto" latinLnBrk="0" hangingPunct="1">
@@ -17728,7 +17748,9 @@
           <a:effectLst/>
         </p:spPr>
         <p:txBody>
-          <a:bodyPr rtlCol="0" anchor="ctr"/>
+          <a:bodyPr wrap="square" rtlCol="0" anchor="ctr">
+            <a:normAutofit/>
+          </a:bodyPr>
           <a:lstStyle>
             <a:defPPr>
               <a:defRPr lang="zh-CN"/>
@@ -17766,7 +17788,7 @@
           <a:p>
             <a:pPr algn="ctr"/>
             <a:r>
-              <a:rPr lang="zh-CN" altLang="en-US" dirty="0"/>
+              <a:rPr lang="zh-CN" altLang="en-US" sz="1600" b="1" dirty="0"/>
               <a:t>三峡库区范围</a:t>
             </a:r>
           </a:p>
@@ -17786,8 +17808,8 @@
         </p:nvSpPr>
         <p:spPr>
           <a:xfrm>
-            <a:off x="0" y="5479892"/>
-            <a:ext cx="12192000" cy="1378108"/>
+            <a:off x="0" y="5550000"/>
+            <a:ext cx="12192000" cy="1300000"/>
           </a:xfrm>
           <a:prstGeom prst="rect">
             <a:avLst/>
@@ -17816,43 +17838,34 @@
           </a:fontRef>
         </p:style>
         <p:txBody>
-          <a:bodyPr rtlCol="0" anchor="ctr"/>
+          <a:bodyPr wrap="square" rtlCol="0" anchor="ctr">
+            <a:normAutofit/>
+          </a:bodyPr>
           <a:lstStyle/>
           <a:p>
             <a:r>
-              <a:t>水禽对湿地环境变化非常敏感，常被用作生物多样性监测的重要指示生物。三峡工程的建设改变了湿地水文结构，耕地和城市扩张加剧了湿地破碎化，导致依赖湿地生存的物种栖息地质量下降。栖息地适宜性评价是开展生物多样性保护的基础与关键。</a:t>
+              <a:t>1995-2020年蓄水分为5个阶段：蓄水前→围堰发电期(135m)→初期蓄水期(156m)→试验蓄水期(175m)→周期性稳定蓄水期(145~175m)。三峡工程改变了湿地水文结构，水禽栖息地质量显著下降，开展栖息地适宜性评价是保护生物多样性的关键。</a:t>
             </a:r>
           </a:p>
         </p:txBody>
       </p:sp>
       <p:pic>
         <p:nvPicPr>
-          <p:cNvPr id="2" name="图片 1">
-            <a:extLst>
-              <a:ext uri="{FF2B5EF4-FFF2-40B4-BE49-F238E27FC236}">
-                <a16:creationId xmlns:a16="http://schemas.microsoft.com/office/drawing/2014/main" id="{F157AE10-6A21-24C8-9203-571E35CEF513}"/>
-              </a:ext>
-            </a:extLst>
-          </p:cNvPr>
+          <p:cNvPr id="44" name="Picture 43" descr="_fig1_study_area.png"/>
           <p:cNvPicPr>
             <a:picLocks noChangeAspect="1"/>
           </p:cNvPicPr>
           <p:nvPr/>
         </p:nvPicPr>
         <p:blipFill>
-          <a:blip r:embed="rId2">
-            <a:extLst>
-              <a:ext uri="{28A0092B-C50C-407E-A947-70E740481C1C}">
-                <a14:useLocalDpi xmlns:a14="http://schemas.microsoft.com/office/drawing/2010/main" val="0"/>
-              </a:ext>
-            </a:extLst>
-          </a:blip>
-          <a:srcRect/>
-          <a:stretch/>
+          <a:blip r:embed="rId2"/>
+          <a:stretch>
+            <a:fillRect/>
+          </a:stretch>
         </p:blipFill>
         <p:spPr>
           <a:xfrm>
-            <a:off x="3886207" y="2094400"/>
+            <a:off x="4038607" y="2110298"/>
             <a:ext cx="4419584" cy="2980933"/>
           </a:xfrm>
           <a:prstGeom prst="rect">
@@ -17914,7 +17927,7 @@
         </p:spPr>
         <p:txBody>
           <a:bodyPr wrap="square" rtlCol="0">
-            <a:spAutoFit/>
+            <a:normAutofit/>
           </a:bodyPr>
           <a:lstStyle>
             <a:defPPr>
@@ -17951,11 +17964,8 @@
             </a:lvl1pPr>
           </a:lstStyle>
           <a:p>
-            <a:pPr lvl="0">
-              <a:defRPr/>
-            </a:pPr>
             <a:r>
-              <a:t>将复杂的生态评价问题分解为多层次结构，为栖息地适宜性的综合评估提供了一种科学、系统的解决方案</a:t>
+              <a:t>将复杂生态评价问题分解为多层次结构，为栖息地适宜性综合评估提供科学、系统的解决方案。</a:t>
             </a:r>
           </a:p>
         </p:txBody>
@@ -17984,7 +17994,9 @@
           </a:prstGeom>
         </p:spPr>
         <p:txBody>
-          <a:bodyPr/>
+          <a:bodyPr wrap="square">
+            <a:normAutofit/>
+          </a:bodyPr>
           <a:lstStyle>
             <a:defPPr>
               <a:defRPr lang="zh-CN"/>
@@ -18197,7 +18209,9 @@
           </a:extLst>
         </p:spPr>
         <p:txBody>
-          <a:bodyPr vert="horz" wrap="square" lIns="91440" tIns="45720" rIns="91440" bIns="45720" numCol="1" anchor="ctr" anchorCtr="0" compatLnSpc="1"/>
+          <a:bodyPr vert="horz" wrap="square" lIns="91440" tIns="45720" rIns="91440" bIns="45720" numCol="1" anchor="ctr" anchorCtr="0" compatLnSpc="1">
+            <a:normAutofit/>
+          </a:bodyPr>
           <a:lstStyle>
             <a:defPPr>
               <a:defRPr lang="en-US"/>
@@ -18448,7 +18462,9 @@
           </a:fontRef>
         </p:style>
         <p:txBody>
-          <a:bodyPr rtlCol="0" anchor="ctr"/>
+          <a:bodyPr wrap="square" rtlCol="0" anchor="ctr">
+            <a:normAutofit/>
+          </a:bodyPr>
           <a:lstStyle/>
           <a:p>
             <a:pPr marL="0" marR="0" lvl="0" indent="0" algn="ctr" defTabSz="914400" rtl="0" eaLnBrk="1" fontAlgn="auto" latinLnBrk="0" hangingPunct="1">
@@ -18853,7 +18869,9 @@
           </a:fontRef>
         </p:style>
         <p:txBody>
-          <a:bodyPr rtlCol="0" anchor="ctr"/>
+          <a:bodyPr wrap="square" rtlCol="0" anchor="ctr">
+            <a:normAutofit/>
+          </a:bodyPr>
           <a:lstStyle/>
           <a:p>
             <a:pPr marL="0" marR="0" lvl="0" indent="0" algn="ctr" defTabSz="914400" rtl="0" eaLnBrk="1" fontAlgn="auto" latinLnBrk="0" hangingPunct="1">
@@ -18947,7 +18965,9 @@
           </a:fontRef>
         </p:style>
         <p:txBody>
-          <a:bodyPr rtlCol="0" anchor="ctr"/>
+          <a:bodyPr wrap="square" rtlCol="0" anchor="ctr">
+            <a:normAutofit/>
+          </a:bodyPr>
           <a:lstStyle/>
           <a:p>
             <a:pPr algn="ctr" defTabSz="457200" eaLnBrk="1" fontAlgn="auto" hangingPunct="1">
@@ -19011,11 +19031,13 @@
           </a:effectLst>
         </p:spPr>
         <p:txBody>
-          <a:bodyPr anchor="ctr"/>
+          <a:bodyPr wrap="square" anchor="ctr">
+            <a:normAutofit/>
+          </a:bodyPr>
           <a:lstStyle/>
           <a:p>
             <a:r>
-              <a:t>三峡库区越冬水禽栖息地适宜性评价需要综合考量食物条件、隐蔽条件、水文条件、气候和人为干扰等多个环境因素。单一因素的评价难以全面反映栖息地质量，需要一种能够系统整合多因素的综合评价方法。</a:t>
+              <a:t>越冬水禽栖息地评价需综合考量食物条件、隐蔽条件、水文条件、气候和人为干扰5个维度，单一维度评价难以全面反映栖息地质量。</a:t>
             </a:r>
           </a:p>
         </p:txBody>
@@ -19060,11 +19082,12 @@
         </p:spPr>
         <p:txBody>
           <a:bodyPr wrap="square" rtlCol="0" anchor="ctr">
-            <a:noAutofit/>
+            <a:normAutofit/>
           </a:bodyPr>
           <a:lstStyle/>
           <a:p>
             <a:r>
+              <a:rPr sz="1400"/>
               <a:t>栖息地多因素综合评价需求</a:t>
             </a:r>
           </a:p>
@@ -19131,7 +19154,9 @@
           </a:effectLst>
         </p:spPr>
         <p:txBody>
-          <a:bodyPr rtlCol="0" anchor="ctr"/>
+          <a:bodyPr wrap="square" rtlCol="0" anchor="ctr">
+            <a:normAutofit/>
+          </a:bodyPr>
           <a:lstStyle/>
           <a:p>
             <a:pPr marL="0" marR="0" lvl="0" indent="0" algn="ctr" defTabSz="914400" eaLnBrk="1" fontAlgn="auto" latinLnBrk="0" hangingPunct="1">
@@ -19210,11 +19235,13 @@
           </a:effectLst>
         </p:spPr>
         <p:txBody>
-          <a:bodyPr anchor="ctr"/>
+          <a:bodyPr wrap="square" anchor="ctr">
+            <a:normAutofit/>
+          </a:bodyPr>
           <a:lstStyle/>
           <a:p>
             <a:r>
-              <a:t>通过建立目标层（栖息地适宜性）、准则层（食物、隐蔽、水文、气候、干扰）和指标层的层次结构，对不同环境因子进行系统分析和权重确定，AHP方法在处理物种分布数据缺乏、具有模糊性的生态评价问题时具有显著优势。</a:t>
+              <a:t>AHP方法建立目标层→准则层→指标层结构，系统分析不同环境因子权重，在物种分布数据缺乏的情况下具有显著优势。</a:t>
             </a:r>
           </a:p>
         </p:txBody>
@@ -19280,7 +19307,9 @@
           </a:effectLst>
         </p:spPr>
         <p:txBody>
-          <a:bodyPr rtlCol="0" anchor="ctr"/>
+          <a:bodyPr wrap="square" rtlCol="0" anchor="ctr">
+            <a:normAutofit/>
+          </a:bodyPr>
           <a:lstStyle/>
           <a:p>
             <a:pPr marL="0" marR="0" lvl="0" indent="0" algn="ctr" defTabSz="914400" eaLnBrk="1" fontAlgn="auto" latinLnBrk="0" hangingPunct="1">
@@ -19351,7 +19380,7 @@
         </p:spPr>
         <p:txBody>
           <a:bodyPr wrap="square" rtlCol="0" anchor="ctr">
-            <a:noAutofit/>
+            <a:normAutofit/>
           </a:bodyPr>
           <a:lstStyle/>
           <a:p>
@@ -19492,7 +19521,9 @@
           </a:effectLst>
         </p:spPr>
         <p:txBody>
-          <a:bodyPr rtlCol="0" anchor="ctr"/>
+          <a:bodyPr wrap="square" rtlCol="0" anchor="ctr">
+            <a:normAutofit/>
+          </a:bodyPr>
           <a:lstStyle/>
           <a:p>
             <a:pPr marL="0" marR="0" lvl="0" indent="0" algn="ctr" defTabSz="914400" eaLnBrk="1" fontAlgn="auto" latinLnBrk="0" hangingPunct="1">
@@ -20755,7 +20786,9 @@
           </a:prstGeom>
         </p:spPr>
         <p:txBody>
-          <a:bodyPr/>
+          <a:bodyPr wrap="square">
+            <a:normAutofit/>
+          </a:bodyPr>
           <a:lstStyle>
             <a:defPPr>
               <a:defRPr lang="zh-CN"/>
@@ -20968,7 +21001,9 @@
           </a:extLst>
         </p:spPr>
         <p:txBody>
-          <a:bodyPr vert="horz" wrap="square" lIns="91440" tIns="45720" rIns="91440" bIns="45720" numCol="1" anchor="ctr" anchorCtr="0" compatLnSpc="1"/>
+          <a:bodyPr vert="horz" wrap="square" lIns="91440" tIns="45720" rIns="91440" bIns="45720" numCol="1" anchor="ctr" anchorCtr="0" compatLnSpc="1">
+            <a:normAutofit/>
+          </a:bodyPr>
           <a:lstStyle>
             <a:defPPr>
               <a:defRPr lang="en-US"/>
@@ -21219,7 +21254,9 @@
           </a:fontRef>
         </p:style>
         <p:txBody>
-          <a:bodyPr rtlCol="0" anchor="ctr"/>
+          <a:bodyPr wrap="square" rtlCol="0" anchor="ctr">
+            <a:normAutofit/>
+          </a:bodyPr>
           <a:lstStyle/>
           <a:p>
             <a:pPr marL="0" marR="0" lvl="0" indent="0" algn="ctr" defTabSz="914400" rtl="0" eaLnBrk="1" fontAlgn="auto" latinLnBrk="0" hangingPunct="1">
@@ -21624,7 +21661,9 @@
           </a:fontRef>
         </p:style>
         <p:txBody>
-          <a:bodyPr rtlCol="0" anchor="ctr"/>
+          <a:bodyPr wrap="square" rtlCol="0" anchor="ctr">
+            <a:normAutofit/>
+          </a:bodyPr>
           <a:lstStyle/>
           <a:p>
             <a:pPr marL="0" marR="0" lvl="0" indent="0" algn="ctr" defTabSz="914400" rtl="0" eaLnBrk="1" fontAlgn="auto" latinLnBrk="0" hangingPunct="1">
@@ -21676,7 +21715,7 @@
         <p:spPr>
           <a:xfrm>
             <a:off x="298115" y="2447991"/>
-            <a:ext cx="3581609" cy="1857753"/>
+            <a:ext cx="3581609" cy="1500000"/>
           </a:xfrm>
           <a:prstGeom prst="rect">
             <a:avLst/>
@@ -21691,12 +21730,12 @@
         </p:spPr>
         <p:txBody>
           <a:bodyPr wrap="square">
-            <a:spAutoFit/>
+            <a:normAutofit/>
           </a:bodyPr>
           <a:lstStyle/>
           <a:p>
             <a:r>
-              <a:t>采用层次分析法（AHP）确定各评价因子的权重。目标层为三峡库区越冬水禽栖息地适宜性评价，准则层涵盖食物条件、隐蔽条件、水文条件、气候和干扰5个方面，指标层包含8个具体评价因子。</a:t>
+              <a:t>目标层：三峡库区越冬水禽栖息地适宜性评价。准则层5项：食物条件(0.454)、隐蔽条件(0.177)、水文条件(0.177)、气候(0.096)、干扰(0.096)，权重通过判断矩阵及一致性检验(CR&lt;0.1)确定。</a:t>
             </a:r>
           </a:p>
         </p:txBody>
@@ -21884,8 +21923,8 @@
         </p:nvSpPr>
         <p:spPr>
           <a:xfrm>
-            <a:off x="298115" y="944284"/>
-            <a:ext cx="11595769" cy="1253677"/>
+            <a:off x="298115" y="1000000"/>
+            <a:ext cx="11595769" cy="800000"/>
           </a:xfrm>
           <a:prstGeom prst="rect">
             <a:avLst/>
@@ -21894,7 +21933,7 @@
         </p:spPr>
         <p:txBody>
           <a:bodyPr wrap="square" rtlCol="0">
-            <a:spAutoFit/>
+            <a:normAutofit/>
           </a:bodyPr>
           <a:lstStyle>
             <a:defPPr>
@@ -21932,7 +21971,7 @@
           </a:lstStyle>
           <a:p>
             <a:r>
-              <a:t>根据水禽越冬的生态需求：选择土地利用类型、坡度、海拔作为食物条件指标；距林缘距离作为隐蔽条件指标；距水源距离作为水文条件指标；越冬期平均温度作为气候指标；距居民区和道路距离作为干扰指标。</a:t>
+              <a:t>指标选取：食物条件（土地利用、坡度、海拔）、隐蔽条件（距林缘距离）、水文条件（距水源距离）、气候（越冬期均温）、干扰（距居民区、道路距离），共8个因子。</a:t>
             </a:r>
           </a:p>
         </p:txBody>
@@ -21953,7 +21992,7 @@
         </p:nvGraphicFramePr>
         <p:xfrm>
           <a:off x="4832141" y="2625261"/>
-          <a:ext cx="6960273" cy="1607478"/>
+          <a:ext cx="6960273" cy="1987793"/>
         </p:xfrm>
         <a:graphic>
           <a:graphicData uri="http://schemas.openxmlformats.org/drawingml/2006/table">
@@ -22047,6 +22086,7 @@
                     <a:lstStyle/>
                     <a:p>
                       <a:r>
+                        <a:rPr sz="1100" b="1"/>
                         <a:t>准则层</a:t>
                       </a:r>
                     </a:p>
@@ -22059,6 +22099,7 @@
                     <a:lstStyle/>
                     <a:p>
                       <a:r>
+                        <a:rPr sz="1100" b="1"/>
                         <a:t>食物条件</a:t>
                       </a:r>
                     </a:p>
@@ -22071,6 +22112,33 @@
                     <a:lstStyle/>
                     <a:p>
                       <a:r>
+                        <a:rPr sz="1100" b="1"/>
+                        <a:t>食物条件</a:t>
+                      </a:r>
+                    </a:p>
+                  </a:txBody>
+                  <a:tcPr marL="68580" marR="68580" marT="0" marB="0"/>
+                </a:tc>
+                <a:tc>
+                  <a:txBody>
+                    <a:bodyPr/>
+                    <a:lstStyle/>
+                    <a:p>
+                      <a:r>
+                        <a:rPr sz="1100" b="1"/>
+                        <a:t>食物条件</a:t>
+                      </a:r>
+                    </a:p>
+                  </a:txBody>
+                  <a:tcPr marL="68580" marR="68580" marT="0" marB="0"/>
+                </a:tc>
+                <a:tc>
+                  <a:txBody>
+                    <a:bodyPr/>
+                    <a:lstStyle/>
+                    <a:p>
+                      <a:r>
+                        <a:rPr sz="1100" b="1"/>
                         <a:t>隐蔽条件</a:t>
                       </a:r>
                     </a:p>
@@ -22083,6 +22151,7 @@
                     <a:lstStyle/>
                     <a:p>
                       <a:r>
+                        <a:rPr sz="1100" b="1"/>
                         <a:t>水文条件</a:t>
                       </a:r>
                     </a:p>
@@ -22095,6 +22164,7 @@
                     <a:lstStyle/>
                     <a:p>
                       <a:r>
+                        <a:rPr sz="1100" b="1"/>
                         <a:t>气候</a:t>
                       </a:r>
                     </a:p>
@@ -22107,6 +22177,7 @@
                     <a:lstStyle/>
                     <a:p>
                       <a:r>
+                        <a:rPr sz="1100" b="1"/>
                         <a:t>干扰</a:t>
                       </a:r>
                     </a:p>
@@ -22117,7 +22188,12 @@
                   <a:txBody>
                     <a:bodyPr/>
                     <a:lstStyle/>
-                    <a:p/>
+                    <a:p>
+                      <a:r>
+                        <a:rPr sz="1100" b="1"/>
+                        <a:t>干扰</a:t>
+                      </a:r>
+                    </a:p>
                   </a:txBody>
                   <a:tcPr marL="68580" marR="68580" marT="0" marB="0"/>
                 </a:tc>
@@ -22125,7 +22201,9 @@
                   <a:txBody>
                     <a:bodyPr/>
                     <a:lstStyle/>
-                    <a:p/>
+                    <a:p>
+                      <a:endParaRPr/>
+                    </a:p>
                   </a:txBody>
                   <a:tcPr marL="68580" marR="68580" marT="0" marB="0"/>
                 </a:tc>
@@ -22133,23 +22211,9 @@
                   <a:txBody>
                     <a:bodyPr/>
                     <a:lstStyle/>
-                    <a:p/>
-                  </a:txBody>
-                  <a:tcPr marL="68580" marR="68580" marT="0" marB="0"/>
-                </a:tc>
-                <a:tc>
-                  <a:txBody>
-                    <a:bodyPr/>
-                    <a:lstStyle/>
-                    <a:p/>
-                  </a:txBody>
-                  <a:tcPr marL="68580" marR="68580" marT="0" marB="0"/>
-                </a:tc>
-                <a:tc>
-                  <a:txBody>
-                    <a:bodyPr/>
-                    <a:lstStyle/>
-                    <a:p/>
+                    <a:p>
+                      <a:endParaRPr/>
+                    </a:p>
                   </a:txBody>
                   <a:tcPr marL="68580" marR="68580" marT="0" marB="0"/>
                 </a:tc>
@@ -22166,7 +22230,8 @@
                     <a:lstStyle/>
                     <a:p>
                       <a:r>
-                        <a:t>权重</a:t>
+                        <a:rPr sz="1000"/>
+                        <a:t>指标层</a:t>
                       </a:r>
                     </a:p>
                   </a:txBody>
@@ -22178,7 +22243,8 @@
                     <a:lstStyle/>
                     <a:p>
                       <a:r>
-                        <a:t>0.454</a:t>
+                        <a:rPr sz="1000"/>
+                        <a:t>土地利用</a:t>
                       </a:r>
                     </a:p>
                   </a:txBody>
@@ -22190,7 +22256,8 @@
                     <a:lstStyle/>
                     <a:p>
                       <a:r>
-                        <a:t>0.177</a:t>
+                        <a:rPr sz="1000"/>
+                        <a:t>坡度</a:t>
                       </a:r>
                     </a:p>
                   </a:txBody>
@@ -22202,7 +22269,8 @@
                     <a:lstStyle/>
                     <a:p>
                       <a:r>
-                        <a:t>0.177</a:t>
+                        <a:rPr sz="1000"/>
+                        <a:t>海拔</a:t>
                       </a:r>
                     </a:p>
                   </a:txBody>
@@ -22214,7 +22282,8 @@
                     <a:lstStyle/>
                     <a:p>
                       <a:r>
-                        <a:t>0.096</a:t>
+                        <a:rPr sz="1000"/>
+                        <a:t>距林缘</a:t>
                       </a:r>
                     </a:p>
                   </a:txBody>
@@ -22226,7 +22295,8 @@
                     <a:lstStyle/>
                     <a:p>
                       <a:r>
-                        <a:t>0.096</a:t>
+                        <a:rPr sz="1000"/>
+                        <a:t>距水源</a:t>
                       </a:r>
                     </a:p>
                   </a:txBody>
@@ -22236,7 +22306,12 @@
                   <a:txBody>
                     <a:bodyPr/>
                     <a:lstStyle/>
-                    <a:p/>
+                    <a:p>
+                      <a:r>
+                        <a:rPr sz="1000"/>
+                        <a:t>越冬期均温</a:t>
+                      </a:r>
+                    </a:p>
                   </a:txBody>
                   <a:tcPr marL="68580" marR="68580" marT="0" marB="0"/>
                 </a:tc>
@@ -22244,7 +22319,12 @@
                   <a:txBody>
                     <a:bodyPr/>
                     <a:lstStyle/>
-                    <a:p/>
+                    <a:p>
+                      <a:r>
+                        <a:rPr sz="1000"/>
+                        <a:t>距居民区</a:t>
+                      </a:r>
+                    </a:p>
                   </a:txBody>
                   <a:tcPr marL="68580" marR="68580" marT="0" marB="0"/>
                 </a:tc>
@@ -22252,7 +22332,12 @@
                   <a:txBody>
                     <a:bodyPr/>
                     <a:lstStyle/>
-                    <a:p/>
+                    <a:p>
+                      <a:r>
+                        <a:rPr sz="1000"/>
+                        <a:t>距道路</a:t>
+                      </a:r>
+                    </a:p>
                   </a:txBody>
                   <a:tcPr marL="68580" marR="68580" marT="0" marB="0"/>
                 </a:tc>
@@ -22260,7 +22345,9 @@
                   <a:txBody>
                     <a:bodyPr/>
                     <a:lstStyle/>
-                    <a:p/>
+                    <a:p>
+                      <a:endParaRPr/>
+                    </a:p>
                   </a:txBody>
                   <a:tcPr marL="68580" marR="68580" marT="0" marB="0"/>
                 </a:tc>
@@ -22268,13 +22355,159 @@
                   <a:txBody>
                     <a:bodyPr/>
                     <a:lstStyle/>
-                    <a:p/>
+                    <a:p>
+                      <a:endParaRPr/>
+                    </a:p>
                   </a:txBody>
                   <a:tcPr marL="68580" marR="68580" marT="0" marB="0"/>
                 </a:tc>
                 <a:extLst>
                   <a:ext uri="{0D108BD9-81ED-4DB2-BD59-A6C34878D82A}">
                     <a16:rowId xmlns:a16="http://schemas.microsoft.com/office/drawing/2014/main" val="2921943575"/>
+                  </a:ext>
+                </a:extLst>
+              </a:tr>
+              <a:tr h="300000">
+                <a:tc>
+                  <a:txBody>
+                    <a:bodyPr/>
+                    <a:lstStyle/>
+                    <a:p>
+                      <a:r>
+                        <a:rPr lang="zh-CN" sz="1000"/>
+                        <a:t>权重</a:t>
+                      </a:r>
+                    </a:p>
+                  </a:txBody>
+                  <a:tcPr/>
+                </a:tc>
+                <a:tc>
+                  <a:txBody>
+                    <a:bodyPr/>
+                    <a:lstStyle/>
+                    <a:p>
+                      <a:r>
+                        <a:rPr lang="zh-CN" sz="1000"/>
+                        <a:t>0.259</a:t>
+                      </a:r>
+                    </a:p>
+                  </a:txBody>
+                  <a:tcPr/>
+                </a:tc>
+                <a:tc>
+                  <a:txBody>
+                    <a:bodyPr/>
+                    <a:lstStyle/>
+                    <a:p>
+                      <a:r>
+                        <a:rPr lang="zh-CN" sz="1000"/>
+                        <a:t>0.065</a:t>
+                      </a:r>
+                    </a:p>
+                  </a:txBody>
+                  <a:tcPr/>
+                </a:tc>
+                <a:tc>
+                  <a:txBody>
+                    <a:bodyPr/>
+                    <a:lstStyle/>
+                    <a:p>
+                      <a:r>
+                        <a:rPr lang="zh-CN" sz="1000"/>
+                        <a:t>0.130</a:t>
+                      </a:r>
+                    </a:p>
+                  </a:txBody>
+                  <a:tcPr/>
+                </a:tc>
+                <a:tc>
+                  <a:txBody>
+                    <a:bodyPr/>
+                    <a:lstStyle/>
+                    <a:p>
+                      <a:r>
+                        <a:rPr lang="zh-CN" sz="1000"/>
+                        <a:t>0.177</a:t>
+                      </a:r>
+                    </a:p>
+                  </a:txBody>
+                  <a:tcPr/>
+                </a:tc>
+                <a:tc>
+                  <a:txBody>
+                    <a:bodyPr/>
+                    <a:lstStyle/>
+                    <a:p>
+                      <a:r>
+                        <a:rPr lang="zh-CN" sz="1000"/>
+                        <a:t>0.177</a:t>
+                      </a:r>
+                    </a:p>
+                  </a:txBody>
+                  <a:tcPr/>
+                </a:tc>
+                <a:tc>
+                  <a:txBody>
+                    <a:bodyPr/>
+                    <a:lstStyle/>
+                    <a:p>
+                      <a:r>
+                        <a:rPr lang="zh-CN" sz="1000"/>
+                        <a:t>0.096</a:t>
+                      </a:r>
+                    </a:p>
+                  </a:txBody>
+                  <a:tcPr/>
+                </a:tc>
+                <a:tc>
+                  <a:txBody>
+                    <a:bodyPr/>
+                    <a:lstStyle/>
+                    <a:p>
+                      <a:r>
+                        <a:rPr lang="zh-CN" sz="1000"/>
+                        <a:t>0.048</a:t>
+                      </a:r>
+                    </a:p>
+                  </a:txBody>
+                  <a:tcPr/>
+                </a:tc>
+                <a:tc>
+                  <a:txBody>
+                    <a:bodyPr/>
+                    <a:lstStyle/>
+                    <a:p>
+                      <a:r>
+                        <a:rPr lang="zh-CN" sz="1000"/>
+                        <a:t>0.048</a:t>
+                      </a:r>
+                    </a:p>
+                  </a:txBody>
+                  <a:tcPr/>
+                </a:tc>
+                <a:tc>
+                  <a:txBody>
+                    <a:bodyPr/>
+                    <a:lstStyle/>
+                    <a:p>
+                      <a:endParaRPr/>
+                    </a:p>
+                  </a:txBody>
+                  <a:tcPr/>
+                </a:tc>
+                <a:tc>
+                  <a:txBody>
+                    <a:bodyPr/>
+                    <a:lstStyle/>
+                    <a:p>
+                      <a:endParaRPr/>
+                    </a:p>
+                  </a:txBody>
+                  <a:tcPr/>
+                </a:tc>
+                <a:extLst>
+                  <a:ext uri="{0D108BD9-81ED-4DB2-BD59-A6C34878D82A}">
+                    <a16:rowId xmlns:a16="http://schemas.microsoft.com/office/drawing/2014/main" val="10002"/>
                   </a:ext>
                 </a:extLst>
               </a:tr>
@@ -22343,7 +22576,9 @@
           </a:effectLst>
         </p:spPr>
         <p:txBody>
-          <a:bodyPr rtlCol="0" anchor="ctr"/>
+          <a:bodyPr wrap="square" rtlCol="0" anchor="ctr">
+            <a:normAutofit/>
+          </a:bodyPr>
           <a:lstStyle/>
           <a:p>
             <a:pPr marL="0" marR="0" lvl="0" indent="0" algn="ctr" defTabSz="914400" eaLnBrk="1" fontAlgn="auto" latinLnBrk="0" hangingPunct="1">
@@ -22440,7 +22675,9 @@
           </a:effectLst>
         </p:spPr>
         <p:txBody>
-          <a:bodyPr rtlCol="0" anchor="ctr"/>
+          <a:bodyPr wrap="square" rtlCol="0" anchor="ctr">
+            <a:normAutofit/>
+          </a:bodyPr>
           <a:lstStyle/>
           <a:p>
             <a:pPr marL="0" marR="0" lvl="0" indent="0" algn="ctr" defTabSz="914400" eaLnBrk="1" fontAlgn="auto" latinLnBrk="0" hangingPunct="1">
@@ -22796,8 +23033,8 @@
         </p:nvSpPr>
         <p:spPr>
           <a:xfrm>
-            <a:off x="298115" y="944284"/>
-            <a:ext cx="11595769" cy="1005788"/>
+            <a:off x="298115" y="1000000"/>
+            <a:ext cx="11595769" cy="800000"/>
           </a:xfrm>
           <a:prstGeom prst="rect">
             <a:avLst/>
@@ -22806,7 +23043,7 @@
         </p:spPr>
         <p:txBody>
           <a:bodyPr wrap="square" rtlCol="0">
-            <a:spAutoFit/>
+            <a:normAutofit/>
           </a:bodyPr>
           <a:lstStyle>
             <a:defPPr>
@@ -22844,7 +23081,7 @@
           </a:lstStyle>
           <a:p>
             <a:r>
-              <a:t>构建判断矩阵：采用层次分析法，根据专家知识和前人研究，对影响水禽越冬栖息地的5个准则层因子（食物条件、隐蔽条件、水文条件、气候、干扰）及各指标因子进行两两比较，利用1-9标度法构建判断矩阵。通过一致性检验（CR &lt; 0.1）确认矩阵合理性。</a:t>
+              <a:t>采用1-9标度法对各因子两两比较构建判断矩阵，通过一致性检验(CR&lt;0.1)后计算特征向量并归一化得到权重。食物条件权重最高(0.454)，气候和干扰最低(各0.096)。</a:t>
             </a:r>
           </a:p>
         </p:txBody>
@@ -22873,7 +23110,9 @@
           </a:prstGeom>
         </p:spPr>
         <p:txBody>
-          <a:bodyPr/>
+          <a:bodyPr wrap="square">
+            <a:normAutofit/>
+          </a:bodyPr>
           <a:lstStyle>
             <a:defPPr>
               <a:defRPr lang="zh-CN"/>
@@ -23086,7 +23325,9 @@
           </a:extLst>
         </p:spPr>
         <p:txBody>
-          <a:bodyPr vert="horz" wrap="square" lIns="91440" tIns="45720" rIns="91440" bIns="45720" numCol="1" anchor="ctr" anchorCtr="0" compatLnSpc="1"/>
+          <a:bodyPr vert="horz" wrap="square" lIns="91440" tIns="45720" rIns="91440" bIns="45720" numCol="1" anchor="ctr" anchorCtr="0" compatLnSpc="1">
+            <a:normAutofit/>
+          </a:bodyPr>
           <a:lstStyle>
             <a:defPPr>
               <a:defRPr lang="en-US"/>
@@ -23337,7 +23578,9 @@
           </a:fontRef>
         </p:style>
         <p:txBody>
-          <a:bodyPr rtlCol="0" anchor="ctr"/>
+          <a:bodyPr wrap="square" rtlCol="0" anchor="ctr">
+            <a:normAutofit/>
+          </a:bodyPr>
           <a:lstStyle/>
           <a:p>
             <a:pPr marL="0" marR="0" lvl="0" indent="0" algn="ctr" defTabSz="914400" rtl="0" eaLnBrk="1" fontAlgn="auto" latinLnBrk="0" hangingPunct="1">
@@ -23742,7 +23985,9 @@
           </a:fontRef>
         </p:style>
         <p:txBody>
-          <a:bodyPr rtlCol="0" anchor="ctr"/>
+          <a:bodyPr wrap="square" rtlCol="0" anchor="ctr">
+            <a:normAutofit/>
+          </a:bodyPr>
           <a:lstStyle/>
           <a:p>
             <a:pPr marL="0" marR="0" lvl="0" indent="0" algn="ctr" defTabSz="914400" rtl="0" eaLnBrk="1" fontAlgn="auto" latinLnBrk="0" hangingPunct="1">
@@ -23793,8 +24038,8 @@
         </p:nvSpPr>
         <p:spPr>
           <a:xfrm>
-            <a:off x="298114" y="1979995"/>
-            <a:ext cx="11595769" cy="1485920"/>
+            <a:off x="428529" y="2300000"/>
+            <a:ext cx="11595769" cy="1000000"/>
           </a:xfrm>
           <a:prstGeom prst="rect">
             <a:avLst/>
@@ -23803,7 +24048,7 @@
         </p:spPr>
         <p:txBody>
           <a:bodyPr wrap="square" rtlCol="0">
-            <a:spAutoFit/>
+            <a:normAutofit fontScale="92500" lnSpcReduction="20000"/>
           </a:bodyPr>
           <a:lstStyle>
             <a:defPPr>
@@ -23841,41 +24086,11 @@
           </a:lstStyle>
           <a:p>
             <a:r>
-              <a:t>计算权重与栖息地适宜性指数：利用判断矩阵的特征向量归一化处理后得到各因子权重。栖息地适宜性指数（HSI）采用加权求和公式：HSI = Σωi·fi，其中ωi为因子i的权重，fi为因子i的定量评价分值。根据HSI值将栖息地划分为最优、良好、一般、较差、最差5个等级。</a:t>
+              <a:t>HSI = Σωi·fi，ωi为因子权重，fi为因子评分。各指标按自然断点分5级：最优(4-5分)、良好(3-4分)、一般(2-3分)、较差(1-2分)、最差(&lt;1分)。最优+良好=适宜生境，较差+最差=不适宜生境。</a:t>
             </a:r>
           </a:p>
         </p:txBody>
       </p:sp>
-      <p:pic>
-        <p:nvPicPr>
-          <p:cNvPr id="4" name="图片 3">
-            <a:extLst>
-              <a:ext uri="{FF2B5EF4-FFF2-40B4-BE49-F238E27FC236}">
-                <a16:creationId xmlns:a16="http://schemas.microsoft.com/office/drawing/2014/main" id="{92CBFF02-B41D-765A-474D-1B0EBD40DC8D}"/>
-              </a:ext>
-            </a:extLst>
-          </p:cNvPr>
-          <p:cNvPicPr>
-            <a:picLocks noChangeAspect="1"/>
-          </p:cNvPicPr>
-          <p:nvPr/>
-        </p:nvPicPr>
-        <p:blipFill>
-          <a:blip r:embed="rId2"/>
-          <a:stretch>
-            <a:fillRect/>
-          </a:stretch>
-        </p:blipFill>
-        <p:spPr>
-          <a:xfrm>
-            <a:off x="3000373" y="3465915"/>
-            <a:ext cx="6191250" cy="3248025"/>
-          </a:xfrm>
-          <a:prstGeom prst="rect">
-            <a:avLst/>
-          </a:prstGeom>
-        </p:spPr>
-      </p:pic>
       <p:sp>
         <p:nvSpPr>
           <p:cNvPr id="5" name="矩形 4">
@@ -23921,7 +24136,9 @@
           </a:fontRef>
         </p:style>
         <p:txBody>
-          <a:bodyPr rtlCol="0" anchor="ctr"/>
+          <a:bodyPr wrap="square" rtlCol="0" anchor="ctr">
+            <a:normAutofit/>
+          </a:bodyPr>
           <a:lstStyle/>
           <a:p>
             <a:pPr algn="ctr"/>
@@ -23929,6 +24146,30 @@
           </a:p>
         </p:txBody>
       </p:sp>
+      <p:pic>
+        <p:nvPicPr>
+          <p:cNvPr id="44" name="Picture 43" descr="_fig_method_tables.png"/>
+          <p:cNvPicPr>
+            <a:picLocks noChangeAspect="1"/>
+          </p:cNvPicPr>
+          <p:nvPr/>
+        </p:nvPicPr>
+        <p:blipFill>
+          <a:blip r:embed="rId2"/>
+          <a:stretch>
+            <a:fillRect/>
+          </a:stretch>
+        </p:blipFill>
+        <p:spPr>
+          <a:xfrm>
+            <a:off x="3000373" y="3556402"/>
+            <a:ext cx="6191250" cy="3248025"/>
+          </a:xfrm>
+          <a:prstGeom prst="rect">
+            <a:avLst/>
+          </a:prstGeom>
+        </p:spPr>
+      </p:pic>
     </p:spTree>
     <p:extLst>
       <p:ext uri="{BB962C8B-B14F-4D97-AF65-F5344CB8AC3E}">
